--- a/ppt/UTS_CP_Reguler_Kelompok01_Presentation.pptx
+++ b/ppt/UTS_CP_Reguler_Kelompok01_Presentation.pptx
@@ -15,17 +15,18 @@
     <p:sldId id="263" r:id="rId13"/>
     <p:sldId id="264" r:id="rId14"/>
     <p:sldId id="265" r:id="rId15"/>
+    <p:sldId id="266" r:id="rId16"/>
   </p:sldIdLst>
   <p:sldSz cx="18288000" cy="10287000"/>
   <p:notesSz cx="6858000" cy="9144000"/>
   <p:embeddedFontLst>
     <p:embeddedFont>
       <p:font typeface="Poppins Bold" charset="1" panose="00000800000000000000"/>
-      <p:regular r:id="rId16"/>
+      <p:regular r:id="rId17"/>
     </p:embeddedFont>
     <p:embeddedFont>
       <p:font typeface="Poppins" charset="1" panose="00000500000000000000"/>
-      <p:regular r:id="rId17"/>
+      <p:regular r:id="rId18"/>
     </p:embeddedFont>
   </p:embeddedFontLst>
   <p:defaultTextStyle>
@@ -3321,7 +3322,7 @@
         </p:nvSpPr>
         <p:spPr>
           <a:xfrm rot="0">
-            <a:off x="1028700" y="2260253"/>
+            <a:off x="1028700" y="2289888"/>
             <a:ext cx="10536062" cy="3328653"/>
           </a:xfrm>
           <a:prstGeom prst="rect">
@@ -3714,6 +3715,456 @@
           </a:blipFill>
         </p:spPr>
       </p:sp>
+      <p:sp>
+        <p:nvSpPr>
+          <p:cNvPr name="TextBox 3" id="3"/>
+          <p:cNvSpPr txBox="true"/>
+          <p:nvPr/>
+        </p:nvSpPr>
+        <p:spPr>
+          <a:xfrm rot="0">
+            <a:off x="1369309" y="2224743"/>
+            <a:ext cx="15889991" cy="1682114"/>
+          </a:xfrm>
+          <a:prstGeom prst="rect">
+            <a:avLst/>
+          </a:prstGeom>
+        </p:spPr>
+        <p:txBody>
+          <a:bodyPr anchor="t" rtlCol="false" tIns="0" lIns="0" bIns="0" rIns="0">
+            <a:spAutoFit/>
+          </a:bodyPr>
+          <a:lstStyle/>
+          <a:p>
+            <a:pPr algn="l">
+              <a:lnSpc>
+                <a:spcPts val="3360"/>
+              </a:lnSpc>
+            </a:pPr>
+            <a:r>
+              <a:rPr lang="en-US" sz="2400">
+                <a:solidFill>
+                  <a:srgbClr val="FFFFFF"/>
+                </a:solidFill>
+                <a:latin typeface="Poppins"/>
+                <a:ea typeface="Poppins"/>
+                <a:cs typeface="Poppins"/>
+                <a:sym typeface="Poppins"/>
+              </a:rPr>
+              <a:t>Traffic awal cukup banyak sehingga paket yang relevan sulit ditemukan. Solusi yang digunakan adalah menerapkan filter dns dan tls pada Wireshark sehingga paket yang berkaitan dengan komunikasi API dapat diidentifikasi dengan lebih mudah.</a:t>
+            </a:r>
+          </a:p>
+          <a:p>
+            <a:pPr algn="l">
+              <a:lnSpc>
+                <a:spcPts val="3360"/>
+              </a:lnSpc>
+              <a:spcBef>
+                <a:spcPct val="0"/>
+              </a:spcBef>
+            </a:pPr>
+          </a:p>
+        </p:txBody>
+      </p:sp>
+      <p:sp>
+        <p:nvSpPr>
+          <p:cNvPr name="TextBox 4" id="4"/>
+          <p:cNvSpPr txBox="true"/>
+          <p:nvPr/>
+        </p:nvSpPr>
+        <p:spPr>
+          <a:xfrm rot="0">
+            <a:off x="1168678" y="847725"/>
+            <a:ext cx="6872497" cy="1095375"/>
+          </a:xfrm>
+          <a:prstGeom prst="rect">
+            <a:avLst/>
+          </a:prstGeom>
+        </p:spPr>
+        <p:txBody>
+          <a:bodyPr anchor="t" rtlCol="false" tIns="0" lIns="0" bIns="0" rIns="0">
+            <a:spAutoFit/>
+          </a:bodyPr>
+          <a:lstStyle/>
+          <a:p>
+            <a:pPr algn="ctr" marL="0" indent="0" lvl="1">
+              <a:lnSpc>
+                <a:spcPts val="8400"/>
+              </a:lnSpc>
+              <a:spcBef>
+                <a:spcPct val="0"/>
+              </a:spcBef>
+            </a:pPr>
+            <a:r>
+              <a:rPr lang="en-US" b="true" sz="6000">
+                <a:solidFill>
+                  <a:srgbClr val="FFFFFF"/>
+                </a:solidFill>
+                <a:latin typeface="Poppins Bold"/>
+                <a:ea typeface="Poppins Bold"/>
+                <a:cs typeface="Poppins Bold"/>
+                <a:sym typeface="Poppins Bold"/>
+              </a:rPr>
+              <a:t>Troubleshooting</a:t>
+            </a:r>
+          </a:p>
+        </p:txBody>
+      </p:sp>
+      <p:grpSp>
+        <p:nvGrpSpPr>
+          <p:cNvPr name="Group 5" id="5"/>
+          <p:cNvGrpSpPr/>
+          <p:nvPr/>
+        </p:nvGrpSpPr>
+        <p:grpSpPr>
+          <a:xfrm rot="0">
+            <a:off x="-560343" y="9889125"/>
+            <a:ext cx="19408687" cy="996493"/>
+            <a:chOff x="0" y="0"/>
+            <a:chExt cx="5111753" cy="262451"/>
+          </a:xfrm>
+        </p:grpSpPr>
+        <p:sp>
+          <p:nvSpPr>
+            <p:cNvPr name="Freeform 6" id="6"/>
+            <p:cNvSpPr/>
+            <p:nvPr/>
+          </p:nvSpPr>
+          <p:spPr>
+            <a:xfrm flipH="false" flipV="false" rot="0">
+              <a:off x="0" y="0"/>
+              <a:ext cx="5111753" cy="262451"/>
+            </a:xfrm>
+            <a:custGeom>
+              <a:avLst/>
+              <a:gdLst/>
+              <a:ahLst/>
+              <a:cxnLst/>
+              <a:rect r="r" b="b" t="t" l="l"/>
+              <a:pathLst>
+                <a:path h="262451" w="5111753">
+                  <a:moveTo>
+                    <a:pt x="0" y="0"/>
+                  </a:moveTo>
+                  <a:lnTo>
+                    <a:pt x="5111753" y="0"/>
+                  </a:lnTo>
+                  <a:lnTo>
+                    <a:pt x="5111753" y="262451"/>
+                  </a:lnTo>
+                  <a:lnTo>
+                    <a:pt x="0" y="262451"/>
+                  </a:lnTo>
+                  <a:close/>
+                </a:path>
+              </a:pathLst>
+            </a:custGeom>
+            <a:solidFill>
+              <a:srgbClr val="5CA3B2"/>
+            </a:solidFill>
+          </p:spPr>
+        </p:sp>
+        <p:sp>
+          <p:nvSpPr>
+            <p:cNvPr name="TextBox 7" id="7"/>
+            <p:cNvSpPr txBox="true"/>
+            <p:nvPr/>
+          </p:nvSpPr>
+          <p:spPr>
+            <a:xfrm>
+              <a:off x="0" y="-57150"/>
+              <a:ext cx="5111753" cy="319601"/>
+            </a:xfrm>
+            <a:prstGeom prst="rect">
+              <a:avLst/>
+            </a:prstGeom>
+          </p:spPr>
+          <p:txBody>
+            <a:bodyPr anchor="ctr" rtlCol="false" tIns="50800" lIns="50800" bIns="50800" rIns="50800"/>
+            <a:lstStyle/>
+            <a:p>
+              <a:pPr algn="ctr">
+                <a:lnSpc>
+                  <a:spcPts val="2659"/>
+                </a:lnSpc>
+                <a:spcBef>
+                  <a:spcPct val="0"/>
+                </a:spcBef>
+              </a:pPr>
+            </a:p>
+          </p:txBody>
+        </p:sp>
+      </p:grpSp>
+      <p:sp>
+        <p:nvSpPr>
+          <p:cNvPr name="Freeform 8" id="8"/>
+          <p:cNvSpPr/>
+          <p:nvPr/>
+        </p:nvSpPr>
+        <p:spPr>
+          <a:xfrm flipH="false" flipV="false" rot="0">
+            <a:off x="16255366" y="769755"/>
+            <a:ext cx="860834" cy="1002427"/>
+          </a:xfrm>
+          <a:custGeom>
+            <a:avLst/>
+            <a:gdLst/>
+            <a:ahLst/>
+            <a:cxnLst/>
+            <a:rect r="r" b="b" t="t" l="l"/>
+            <a:pathLst>
+              <a:path h="1002427" w="860834">
+                <a:moveTo>
+                  <a:pt x="0" y="0"/>
+                </a:moveTo>
+                <a:lnTo>
+                  <a:pt x="860835" y="0"/>
+                </a:lnTo>
+                <a:lnTo>
+                  <a:pt x="860835" y="1002428"/>
+                </a:lnTo>
+                <a:lnTo>
+                  <a:pt x="0" y="1002428"/>
+                </a:lnTo>
+                <a:lnTo>
+                  <a:pt x="0" y="0"/>
+                </a:lnTo>
+                <a:close/>
+              </a:path>
+            </a:pathLst>
+          </a:custGeom>
+          <a:blipFill>
+            <a:blip r:embed="rId3">
+              <a:extLst>
+                <a:ext uri="{96DAC541-7B7A-43D3-8B79-37D633B846F1}">
+                  <asvg:svgBlip xmlns:asvg="http://schemas.microsoft.com/office/drawing/2016/SVG/main" r:embed="rId4"/>
+                </a:ext>
+              </a:extLst>
+            </a:blip>
+            <a:stretch>
+              <a:fillRect l="0" t="0" r="0" b="0"/>
+            </a:stretch>
+          </a:blipFill>
+        </p:spPr>
+      </p:sp>
+      <p:sp>
+        <p:nvSpPr>
+          <p:cNvPr name="Freeform 9" id="9"/>
+          <p:cNvSpPr/>
+          <p:nvPr/>
+        </p:nvSpPr>
+        <p:spPr>
+          <a:xfrm flipH="false" flipV="false" rot="0">
+            <a:off x="-230871" y="1028700"/>
+            <a:ext cx="860834" cy="1002427"/>
+          </a:xfrm>
+          <a:custGeom>
+            <a:avLst/>
+            <a:gdLst/>
+            <a:ahLst/>
+            <a:cxnLst/>
+            <a:rect r="r" b="b" t="t" l="l"/>
+            <a:pathLst>
+              <a:path h="1002427" w="860834">
+                <a:moveTo>
+                  <a:pt x="0" y="0"/>
+                </a:moveTo>
+                <a:lnTo>
+                  <a:pt x="860835" y="0"/>
+                </a:lnTo>
+                <a:lnTo>
+                  <a:pt x="860835" y="1002427"/>
+                </a:lnTo>
+                <a:lnTo>
+                  <a:pt x="0" y="1002427"/>
+                </a:lnTo>
+                <a:lnTo>
+                  <a:pt x="0" y="0"/>
+                </a:lnTo>
+                <a:close/>
+              </a:path>
+            </a:pathLst>
+          </a:custGeom>
+          <a:blipFill>
+            <a:blip r:embed="rId3">
+              <a:extLst>
+                <a:ext uri="{96DAC541-7B7A-43D3-8B79-37D633B846F1}">
+                  <asvg:svgBlip xmlns:asvg="http://schemas.microsoft.com/office/drawing/2016/SVG/main" r:embed="rId4"/>
+                </a:ext>
+              </a:extLst>
+            </a:blip>
+            <a:stretch>
+              <a:fillRect l="0" t="0" r="0" b="0"/>
+            </a:stretch>
+          </a:blipFill>
+        </p:spPr>
+      </p:sp>
+      <p:sp>
+        <p:nvSpPr>
+          <p:cNvPr name="TextBox 10" id="10"/>
+          <p:cNvSpPr txBox="true"/>
+          <p:nvPr/>
+        </p:nvSpPr>
+        <p:spPr>
+          <a:xfrm rot="0">
+            <a:off x="1168678" y="3725882"/>
+            <a:ext cx="5274557" cy="1095375"/>
+          </a:xfrm>
+          <a:prstGeom prst="rect">
+            <a:avLst/>
+          </a:prstGeom>
+        </p:spPr>
+        <p:txBody>
+          <a:bodyPr anchor="t" rtlCol="false" tIns="0" lIns="0" bIns="0" rIns="0">
+            <a:spAutoFit/>
+          </a:bodyPr>
+          <a:lstStyle/>
+          <a:p>
+            <a:pPr algn="ctr" marL="0" indent="0" lvl="1">
+              <a:lnSpc>
+                <a:spcPts val="8400"/>
+              </a:lnSpc>
+              <a:spcBef>
+                <a:spcPct val="0"/>
+              </a:spcBef>
+            </a:pPr>
+            <a:r>
+              <a:rPr lang="en-US" b="true" sz="6000">
+                <a:solidFill>
+                  <a:srgbClr val="FFFFFF"/>
+                </a:solidFill>
+                <a:latin typeface="Poppins Bold"/>
+                <a:ea typeface="Poppins Bold"/>
+                <a:cs typeface="Poppins Bold"/>
+                <a:sym typeface="Poppins Bold"/>
+              </a:rPr>
+              <a:t>Kesimpulan</a:t>
+            </a:r>
+          </a:p>
+        </p:txBody>
+      </p:sp>
+      <p:sp>
+        <p:nvSpPr>
+          <p:cNvPr name="TextBox 11" id="11"/>
+          <p:cNvSpPr txBox="true"/>
+          <p:nvPr/>
+        </p:nvSpPr>
+        <p:spPr>
+          <a:xfrm rot="0">
+            <a:off x="1369309" y="4754582"/>
+            <a:ext cx="15889991" cy="3358514"/>
+          </a:xfrm>
+          <a:prstGeom prst="rect">
+            <a:avLst/>
+          </a:prstGeom>
+        </p:spPr>
+        <p:txBody>
+          <a:bodyPr anchor="t" rtlCol="false" tIns="0" lIns="0" bIns="0" rIns="0">
+            <a:spAutoFit/>
+          </a:bodyPr>
+          <a:lstStyle/>
+          <a:p>
+            <a:pPr algn="l">
+              <a:lnSpc>
+                <a:spcPts val="3360"/>
+              </a:lnSpc>
+            </a:pPr>
+          </a:p>
+          <a:p>
+            <a:pPr algn="l">
+              <a:lnSpc>
+                <a:spcPts val="3360"/>
+              </a:lnSpc>
+              <a:spcBef>
+                <a:spcPct val="0"/>
+              </a:spcBef>
+            </a:pPr>
+            <a:r>
+              <a:rPr lang="en-US" sz="2400">
+                <a:solidFill>
+                  <a:srgbClr val="FFFFFF"/>
+                </a:solidFill>
+                <a:latin typeface="Poppins"/>
+                <a:ea typeface="Poppins"/>
+                <a:cs typeface="Poppins"/>
+                <a:sym typeface="Poppins"/>
+              </a:rPr>
+              <a:t>Praktikum berhasil menunjukkan proses komunikasi data antara client dan server melalui HTTP. Pengujian API menggunakan Postman menghasilkan response sukses (200 OK dan 201 Created), sementara Wireshark menunjukkan tahapan komunikasi jaringan seperti TCP Handshake, HTTP Request/Response, dan TCP Retransmission. Data JSON yang diterima kemudian dianalisis dan diparsing menggunakan Python menjadi DataFrame atau CSV, sehingga lebih mudah dibaca dan diolah. Praktikum ini memberikan pemahaman mengenai hubungan antara TCP, HTTP, JSON, packet capture, dan parsing data dalam sistem komunikasi modern.</a:t>
+            </a:r>
+          </a:p>
+        </p:txBody>
+      </p:sp>
+    </p:spTree>
+  </p:cSld>
+  <p:clrMapOvr>
+    <a:masterClrMapping/>
+  </p:clrMapOvr>
+</p:sld>
+</file>
+
+<file path=ppt/slides/slide11.xml><?xml version="1.0" encoding="utf-8"?>
+<p:sld xmlns:p="http://schemas.openxmlformats.org/presentationml/2006/main" xmlns:a="http://schemas.openxmlformats.org/drawingml/2006/main" xmlns:r="http://schemas.openxmlformats.org/officeDocument/2006/relationships">
+  <p:cSld>
+    <p:spTree>
+      <p:nvGrpSpPr>
+        <p:cNvPr id="1" name=""/>
+        <p:cNvGrpSpPr/>
+        <p:nvPr/>
+      </p:nvGrpSpPr>
+      <p:grpSpPr>
+        <a:xfrm>
+          <a:off x="0" y="0"/>
+          <a:ext cx="0" cy="0"/>
+          <a:chOff x="0" y="0"/>
+          <a:chExt cx="0" cy="0"/>
+        </a:xfrm>
+      </p:grpSpPr>
+      <p:sp>
+        <p:nvSpPr>
+          <p:cNvPr name="Freeform 2" id="2"/>
+          <p:cNvSpPr/>
+          <p:nvPr/>
+        </p:nvSpPr>
+        <p:spPr>
+          <a:xfrm flipH="false" flipV="false" rot="0">
+            <a:off x="0" y="0"/>
+            <a:ext cx="18288000" cy="10287000"/>
+          </a:xfrm>
+          <a:custGeom>
+            <a:avLst/>
+            <a:gdLst/>
+            <a:ahLst/>
+            <a:cxnLst/>
+            <a:rect r="r" b="b" t="t" l="l"/>
+            <a:pathLst>
+              <a:path h="10287000" w="18288000">
+                <a:moveTo>
+                  <a:pt x="0" y="0"/>
+                </a:moveTo>
+                <a:lnTo>
+                  <a:pt x="18288000" y="0"/>
+                </a:lnTo>
+                <a:lnTo>
+                  <a:pt x="18288000" y="10287000"/>
+                </a:lnTo>
+                <a:lnTo>
+                  <a:pt x="0" y="10287000"/>
+                </a:lnTo>
+                <a:lnTo>
+                  <a:pt x="0" y="0"/>
+                </a:lnTo>
+                <a:close/>
+              </a:path>
+            </a:pathLst>
+          </a:custGeom>
+          <a:blipFill>
+            <a:blip r:embed="rId2"/>
+            <a:stretch>
+              <a:fillRect l="0" t="-38888" r="0" b="-38888"/>
+            </a:stretch>
+          </a:blipFill>
+        </p:spPr>
+      </p:sp>
       <p:grpSp>
         <p:nvGrpSpPr>
           <p:cNvPr name="Group 3" id="3"/>
@@ -5996,52 +6447,6 @@
         </p:nvSpPr>
         <p:spPr>
           <a:xfrm flipH="false" flipV="false" rot="0">
-            <a:off x="9505672" y="1968875"/>
-            <a:ext cx="8155007" cy="1025442"/>
-          </a:xfrm>
-          <a:custGeom>
-            <a:avLst/>
-            <a:gdLst/>
-            <a:ahLst/>
-            <a:cxnLst/>
-            <a:rect r="r" b="b" t="t" l="l"/>
-            <a:pathLst>
-              <a:path h="1025442" w="8155007">
-                <a:moveTo>
-                  <a:pt x="0" y="0"/>
-                </a:moveTo>
-                <a:lnTo>
-                  <a:pt x="8155008" y="0"/>
-                </a:lnTo>
-                <a:lnTo>
-                  <a:pt x="8155008" y="1025442"/>
-                </a:lnTo>
-                <a:lnTo>
-                  <a:pt x="0" y="1025442"/>
-                </a:lnTo>
-                <a:lnTo>
-                  <a:pt x="0" y="0"/>
-                </a:lnTo>
-                <a:close/>
-              </a:path>
-            </a:pathLst>
-          </a:custGeom>
-          <a:blipFill>
-            <a:blip r:embed="rId6"/>
-            <a:stretch>
-              <a:fillRect l="-21488" t="0" r="0" b="-412065"/>
-            </a:stretch>
-          </a:blipFill>
-        </p:spPr>
-      </p:sp>
-      <p:sp>
-        <p:nvSpPr>
-          <p:cNvPr name="Freeform 9" id="9"/>
-          <p:cNvSpPr/>
-          <p:nvPr/>
-        </p:nvSpPr>
-        <p:spPr>
-          <a:xfrm flipH="false" flipV="false" rot="0">
             <a:off x="738692" y="4501718"/>
             <a:ext cx="8145502" cy="3882973"/>
           </a:xfrm>
@@ -6082,7 +6487,7 @@
       </p:sp>
       <p:sp>
         <p:nvSpPr>
-          <p:cNvPr name="Freeform 10" id="10"/>
+          <p:cNvPr name="Freeform 9" id="9"/>
           <p:cNvSpPr/>
           <p:nvPr/>
         </p:nvSpPr>
@@ -6128,14 +6533,14 @@
       </p:sp>
       <p:sp>
         <p:nvSpPr>
-          <p:cNvPr name="Freeform 11" id="11"/>
+          <p:cNvPr name="Freeform 10" id="10"/>
           <p:cNvSpPr/>
           <p:nvPr/>
         </p:nvSpPr>
         <p:spPr>
           <a:xfrm flipH="false" flipV="false" rot="0">
-            <a:off x="9505672" y="4501718"/>
-            <a:ext cx="8436307" cy="3882973"/>
+            <a:off x="9441020" y="5477071"/>
+            <a:ext cx="8560059" cy="2934915"/>
           </a:xfrm>
           <a:custGeom>
             <a:avLst/>
@@ -6144,18 +6549,18 @@
             <a:cxnLst/>
             <a:rect r="r" b="b" t="t" l="l"/>
             <a:pathLst>
-              <a:path h="3882973" w="8436307">
+              <a:path h="2934915" w="8560059">
                 <a:moveTo>
                   <a:pt x="0" y="0"/>
                 </a:moveTo>
                 <a:lnTo>
-                  <a:pt x="8436308" y="0"/>
-                </a:lnTo>
-                <a:lnTo>
-                  <a:pt x="8436308" y="3882974"/>
-                </a:lnTo>
-                <a:lnTo>
-                  <a:pt x="0" y="3882974"/>
+                  <a:pt x="8560059" y="0"/>
+                </a:lnTo>
+                <a:lnTo>
+                  <a:pt x="8560059" y="2934915"/>
+                </a:lnTo>
+                <a:lnTo>
+                  <a:pt x="0" y="2934915"/>
                 </a:lnTo>
                 <a:lnTo>
                   <a:pt x="0" y="0"/>
@@ -6167,7 +6572,53 @@
           <a:blipFill>
             <a:blip r:embed="rId6"/>
             <a:stretch>
-              <a:fillRect l="-26794" t="-64064" r="-15685" b="0"/>
+              <a:fillRect l="-24961" t="-84759" r="-15458" b="-32302"/>
+            </a:stretch>
+          </a:blipFill>
+        </p:spPr>
+      </p:sp>
+      <p:sp>
+        <p:nvSpPr>
+          <p:cNvPr name="Freeform 11" id="11"/>
+          <p:cNvSpPr/>
+          <p:nvPr/>
+        </p:nvSpPr>
+        <p:spPr>
+          <a:xfrm flipH="false" flipV="false" rot="0">
+            <a:off x="9280515" y="1952320"/>
+            <a:ext cx="8881069" cy="2100846"/>
+          </a:xfrm>
+          <a:custGeom>
+            <a:avLst/>
+            <a:gdLst/>
+            <a:ahLst/>
+            <a:cxnLst/>
+            <a:rect r="r" b="b" t="t" l="l"/>
+            <a:pathLst>
+              <a:path h="2100846" w="8881069">
+                <a:moveTo>
+                  <a:pt x="0" y="0"/>
+                </a:moveTo>
+                <a:lnTo>
+                  <a:pt x="8881069" y="0"/>
+                </a:lnTo>
+                <a:lnTo>
+                  <a:pt x="8881069" y="2100846"/>
+                </a:lnTo>
+                <a:lnTo>
+                  <a:pt x="0" y="2100846"/>
+                </a:lnTo>
+                <a:lnTo>
+                  <a:pt x="0" y="0"/>
+                </a:lnTo>
+                <a:close/>
+              </a:path>
+            </a:pathLst>
+          </a:custGeom>
+          <a:blipFill>
+            <a:blip r:embed="rId6"/>
+            <a:stretch>
+              <a:fillRect l="-22621" t="0" r="0" b="-174734"/>
             </a:stretch>
           </a:blipFill>
         </p:spPr>
@@ -6221,7 +6672,7 @@
         </p:nvSpPr>
         <p:spPr>
           <a:xfrm rot="0">
-            <a:off x="3110232" y="3915686"/>
+            <a:off x="-1569742" y="3963311"/>
             <a:ext cx="12790881" cy="488317"/>
           </a:xfrm>
           <a:prstGeom prst="rect">
@@ -6249,7 +6700,7 @@
                 <a:cs typeface="Poppins Bold"/>
                 <a:sym typeface="Poppins Bold"/>
               </a:rPr>
-              <a:t>Hasil Request GET/POST</a:t>
+              <a:t>Hasil Request GET</a:t>
             </a:r>
           </a:p>
         </p:txBody>
@@ -6306,7 +6757,7 @@
         </p:nvSpPr>
         <p:spPr>
           <a:xfrm rot="0">
-            <a:off x="9685749" y="3102176"/>
+            <a:off x="9810345" y="4186516"/>
             <a:ext cx="6782693" cy="368300"/>
           </a:xfrm>
           <a:prstGeom prst="rect">
@@ -6426,6 +6877,50 @@
                 <a:sym typeface="Poppins"/>
               </a:rPr>
               <a:t>Status Code  : 201 Created. </a:t>
+            </a:r>
+          </a:p>
+        </p:txBody>
+      </p:sp>
+      <p:sp>
+        <p:nvSpPr>
+          <p:cNvPr name="TextBox 18" id="18"/>
+          <p:cNvSpPr txBox="true"/>
+          <p:nvPr/>
+        </p:nvSpPr>
+        <p:spPr>
+          <a:xfrm rot="0">
+            <a:off x="11543471" y="4651571"/>
+            <a:ext cx="4355157" cy="635000"/>
+          </a:xfrm>
+          <a:prstGeom prst="rect">
+            <a:avLst/>
+          </a:prstGeom>
+        </p:spPr>
+        <p:txBody>
+          <a:bodyPr anchor="t" rtlCol="false" tIns="0" lIns="0" bIns="0" rIns="0">
+            <a:spAutoFit/>
+          </a:bodyPr>
+          <a:lstStyle/>
+          <a:p>
+            <a:pPr algn="ctr">
+              <a:lnSpc>
+                <a:spcPts val="4900"/>
+              </a:lnSpc>
+              <a:spcBef>
+                <a:spcPct val="0"/>
+              </a:spcBef>
+            </a:pPr>
+            <a:r>
+              <a:rPr lang="en-US" b="true" sz="3500">
+                <a:solidFill>
+                  <a:srgbClr val="FFFFFF"/>
+                </a:solidFill>
+                <a:latin typeface="Poppins Bold"/>
+                <a:ea typeface="Poppins Bold"/>
+                <a:cs typeface="Poppins Bold"/>
+                <a:sym typeface="Poppins Bold"/>
+              </a:rPr>
+              <a:t>Hasil Request POST</a:t>
             </a:r>
           </a:p>
         </p:txBody>
@@ -6594,7 +7089,7 @@
         </p:nvSpPr>
         <p:spPr>
           <a:xfrm flipH="false" flipV="false" rot="0">
-            <a:off x="1285082" y="1949734"/>
+            <a:off x="1193381" y="1962768"/>
             <a:ext cx="7317020" cy="3914606"/>
           </a:xfrm>
           <a:custGeom>
@@ -6612,10 +7107,10 @@
                   <a:pt x="7317020" y="0"/>
                 </a:lnTo>
                 <a:lnTo>
-                  <a:pt x="7317020" y="3914605"/>
-                </a:lnTo>
-                <a:lnTo>
-                  <a:pt x="0" y="3914605"/>
+                  <a:pt x="7317020" y="3914606"/>
+                </a:lnTo>
+                <a:lnTo>
+                  <a:pt x="0" y="3914606"/>
                 </a:lnTo>
                 <a:lnTo>
                   <a:pt x="0" y="0"/>
@@ -6640,8 +7135,8 @@
         </p:nvSpPr>
         <p:spPr>
           <a:xfrm flipH="false" flipV="false" rot="0">
-            <a:off x="5743336" y="6264389"/>
-            <a:ext cx="6285911" cy="3221530"/>
+            <a:off x="9605400" y="2177598"/>
+            <a:ext cx="7653900" cy="3712142"/>
           </a:xfrm>
           <a:custGeom>
             <a:avLst/>
@@ -6650,18 +7145,18 @@
             <a:cxnLst/>
             <a:rect r="r" b="b" t="t" l="l"/>
             <a:pathLst>
-              <a:path h="3221530" w="6285911">
+              <a:path h="3712142" w="7653900">
                 <a:moveTo>
                   <a:pt x="0" y="0"/>
                 </a:moveTo>
                 <a:lnTo>
-                  <a:pt x="6285911" y="0"/>
-                </a:lnTo>
-                <a:lnTo>
-                  <a:pt x="6285911" y="3221530"/>
-                </a:lnTo>
-                <a:lnTo>
-                  <a:pt x="0" y="3221530"/>
+                  <a:pt x="7653900" y="0"/>
+                </a:lnTo>
+                <a:lnTo>
+                  <a:pt x="7653900" y="3712141"/>
+                </a:lnTo>
+                <a:lnTo>
+                  <a:pt x="0" y="3712141"/>
                 </a:lnTo>
                 <a:lnTo>
                   <a:pt x="0" y="0"/>
@@ -6686,8 +7181,8 @@
         </p:nvSpPr>
         <p:spPr>
           <a:xfrm flipH="false" flipV="false" rot="0">
-            <a:off x="9656765" y="1910321"/>
-            <a:ext cx="6959299" cy="3914606"/>
+            <a:off x="6252670" y="6508864"/>
+            <a:ext cx="6040512" cy="3209022"/>
           </a:xfrm>
           <a:custGeom>
             <a:avLst/>
@@ -6696,18 +7191,18 @@
             <a:cxnLst/>
             <a:rect r="r" b="b" t="t" l="l"/>
             <a:pathLst>
-              <a:path h="3914606" w="6959299">
+              <a:path h="3209022" w="6040512">
                 <a:moveTo>
                   <a:pt x="0" y="0"/>
                 </a:moveTo>
                 <a:lnTo>
-                  <a:pt x="6959299" y="0"/>
-                </a:lnTo>
-                <a:lnTo>
-                  <a:pt x="6959299" y="3914605"/>
-                </a:lnTo>
-                <a:lnTo>
-                  <a:pt x="0" y="3914605"/>
+                  <a:pt x="6040512" y="0"/>
+                </a:lnTo>
+                <a:lnTo>
+                  <a:pt x="6040512" y="3209022"/>
+                </a:lnTo>
+                <a:lnTo>
+                  <a:pt x="0" y="3209022"/>
                 </a:lnTo>
                 <a:lnTo>
                   <a:pt x="0" y="0"/>
@@ -6861,8 +7356,8 @@
         </p:nvSpPr>
         <p:spPr>
           <a:xfrm rot="0">
-            <a:off x="5575462" y="5823064"/>
-            <a:ext cx="1318887" cy="441325"/>
+            <a:off x="6252670" y="6067539"/>
+            <a:ext cx="5782660" cy="441325"/>
           </a:xfrm>
           <a:prstGeom prst="rect">
             <a:avLst/>
@@ -6892,7 +7387,7 @@
                 <a:cs typeface="Poppins"/>
                 <a:sym typeface="Poppins"/>
               </a:rPr>
-              <a:t>TLS</a:t>
+              <a:t>TLS (HTTP yang tidak terbaca)</a:t>
             </a:r>
           </a:p>
         </p:txBody>
@@ -7106,9 +7601,9 @@
         <p:grpSpPr>
           <a:xfrm rot="0">
             <a:off x="873862" y="2012308"/>
-            <a:ext cx="5247810" cy="7245992"/>
+            <a:ext cx="5236365" cy="7245992"/>
             <a:chOff x="0" y="0"/>
-            <a:chExt cx="6997080" cy="9661322"/>
+            <a:chExt cx="6981819" cy="9661322"/>
           </a:xfrm>
         </p:grpSpPr>
         <p:grpSp>
@@ -7120,9 +7615,9 @@
           <p:grpSpPr>
             <a:xfrm rot="0">
               <a:off x="0" y="0"/>
-              <a:ext cx="6997080" cy="9661322"/>
+              <a:ext cx="6981819" cy="9661322"/>
               <a:chOff x="0" y="0"/>
-              <a:chExt cx="1341464" cy="1852246"/>
+              <a:chExt cx="1338538" cy="1852246"/>
             </a:xfrm>
           </p:grpSpPr>
           <p:sp>
@@ -7134,7 +7629,7 @@
             <p:spPr>
               <a:xfrm flipH="false" flipV="false" rot="0">
                 <a:off x="0" y="0"/>
-                <a:ext cx="1341464" cy="1852246"/>
+                <a:ext cx="1338538" cy="1852246"/>
               </a:xfrm>
               <a:custGeom>
                 <a:avLst/>
@@ -7143,41 +7638,46 @@
                 <a:cxnLst/>
                 <a:rect r="r" b="b" t="t" l="l"/>
                 <a:pathLst>
-                  <a:path h="1852246" w="1341464">
+                  <a:path h="1852246" w="1338538">
                     <a:moveTo>
-                      <a:pt x="75239" y="0"/>
+                      <a:pt x="75403" y="0"/>
                     </a:moveTo>
                     <a:lnTo>
-                      <a:pt x="1266225" y="0"/>
+                      <a:pt x="1263135" y="0"/>
                     </a:lnTo>
                     <a:cubicBezTo>
-                      <a:pt x="1307779" y="0"/>
-                      <a:pt x="1341464" y="33685"/>
-                      <a:pt x="1341464" y="75239"/>
+                      <a:pt x="1283133" y="0"/>
+                      <a:pt x="1302312" y="7944"/>
+                      <a:pt x="1316453" y="22085"/>
+                    </a:cubicBezTo>
+                    <a:cubicBezTo>
+                      <a:pt x="1330594" y="36226"/>
+                      <a:pt x="1338538" y="55405"/>
+                      <a:pt x="1338538" y="75403"/>
                     </a:cubicBezTo>
                     <a:lnTo>
-                      <a:pt x="1341464" y="1777008"/>
+                      <a:pt x="1338538" y="1776843"/>
                     </a:lnTo>
                     <a:cubicBezTo>
-                      <a:pt x="1341464" y="1818561"/>
-                      <a:pt x="1307779" y="1852246"/>
-                      <a:pt x="1266225" y="1852246"/>
+                      <a:pt x="1338538" y="1818487"/>
+                      <a:pt x="1304779" y="1852246"/>
+                      <a:pt x="1263135" y="1852246"/>
                     </a:cubicBezTo>
                     <a:lnTo>
-                      <a:pt x="75239" y="1852246"/>
+                      <a:pt x="75403" y="1852246"/>
                     </a:lnTo>
                     <a:cubicBezTo>
-                      <a:pt x="33685" y="1852246"/>
-                      <a:pt x="0" y="1818561"/>
-                      <a:pt x="0" y="1777008"/>
+                      <a:pt x="33759" y="1852246"/>
+                      <a:pt x="0" y="1818487"/>
+                      <a:pt x="0" y="1776843"/>
                     </a:cubicBezTo>
                     <a:lnTo>
-                      <a:pt x="0" y="75239"/>
+                      <a:pt x="0" y="75403"/>
                     </a:lnTo>
                     <a:cubicBezTo>
-                      <a:pt x="0" y="33685"/>
-                      <a:pt x="33685" y="0"/>
-                      <a:pt x="75239" y="0"/>
+                      <a:pt x="0" y="33759"/>
+                      <a:pt x="33759" y="0"/>
+                      <a:pt x="75403" y="0"/>
                     </a:cubicBezTo>
                     <a:close/>
                   </a:path>
@@ -7201,7 +7701,7 @@
             <p:spPr>
               <a:xfrm>
                 <a:off x="0" y="-66675"/>
-                <a:ext cx="1341464" cy="1918921"/>
+                <a:ext cx="1338538" cy="1918921"/>
               </a:xfrm>
               <a:prstGeom prst="rect">
                 <a:avLst/>
@@ -7228,8 +7728,8 @@
           </p:nvSpPr>
           <p:spPr>
             <a:xfrm rot="0">
-              <a:off x="890493" y="764744"/>
-              <a:ext cx="5248113" cy="1785183"/>
+              <a:off x="888551" y="764744"/>
+              <a:ext cx="5236667" cy="1785183"/>
             </a:xfrm>
             <a:prstGeom prst="rect">
               <a:avLst/>
@@ -7269,8 +7769,8 @@
           </p:nvSpPr>
           <p:spPr>
             <a:xfrm rot="0">
-              <a:off x="379128" y="3397024"/>
-              <a:ext cx="6238825" cy="5797140"/>
+              <a:off x="378301" y="3397024"/>
+              <a:ext cx="6225217" cy="5477149"/>
             </a:xfrm>
             <a:prstGeom prst="rect">
               <a:avLst/>
@@ -7284,11 +7784,11 @@
             <a:p>
               <a:pPr algn="just">
                 <a:lnSpc>
-                  <a:spcPts val="2884"/>
+                  <a:spcPts val="2744"/>
                 </a:lnSpc>
               </a:pPr>
               <a:r>
-                <a:rPr lang="en-US" sz="2060">
+                <a:rPr lang="en-US" sz="1960">
                   <a:solidFill>
                     <a:srgbClr val="FFFFFF"/>
                   </a:solidFill>
@@ -7303,11 +7803,11 @@
             <a:p>
               <a:pPr algn="just">
                 <a:lnSpc>
-                  <a:spcPts val="2884"/>
+                  <a:spcPts val="2744"/>
                 </a:lnSpc>
               </a:pPr>
               <a:r>
-                <a:rPr lang="en-US" sz="2060">
+                <a:rPr lang="en-US" sz="1960">
                   <a:solidFill>
                     <a:srgbClr val="FFFFFF"/>
                   </a:solidFill>
@@ -7322,18 +7822,18 @@
             <a:p>
               <a:pPr algn="just">
                 <a:lnSpc>
-                  <a:spcPts val="2884"/>
+                  <a:spcPts val="2744"/>
                 </a:lnSpc>
               </a:pPr>
             </a:p>
             <a:p>
               <a:pPr algn="just">
                 <a:lnSpc>
-                  <a:spcPts val="2884"/>
+                  <a:spcPts val="2744"/>
                 </a:lnSpc>
               </a:pPr>
               <a:r>
-                <a:rPr lang="en-US" sz="2060">
+                <a:rPr lang="en-US" sz="1960">
                   <a:solidFill>
                     <a:srgbClr val="FFFFFF"/>
                   </a:solidFill>
@@ -7348,14 +7848,14 @@
             <a:p>
               <a:pPr algn="just">
                 <a:lnSpc>
-                  <a:spcPts val="2884"/>
+                  <a:spcPts val="2744"/>
                 </a:lnSpc>
                 <a:spcBef>
                   <a:spcPct val="0"/>
                 </a:spcBef>
               </a:pPr>
               <a:r>
-                <a:rPr lang="en-US" sz="2060">
+                <a:rPr lang="en-US" sz="1960">
                   <a:solidFill>
                     <a:srgbClr val="FFFFFF"/>
                   </a:solidFill>
@@ -7378,7 +7878,7 @@
           <p:spPr>
             <a:xfrm>
               <a:off x="0" y="3003324"/>
-              <a:ext cx="6997080" cy="0"/>
+              <a:ext cx="6981819" cy="0"/>
             </a:xfrm>
             <a:prstGeom prst="line">
               <a:avLst/>
@@ -7454,10 +7954,10 @@
         </p:nvGrpSpPr>
         <p:grpSpPr>
           <a:xfrm rot="0">
-            <a:off x="6777208" y="2012308"/>
-            <a:ext cx="5259817" cy="7245992"/>
+            <a:off x="6738877" y="2012308"/>
+            <a:ext cx="4833548" cy="7245992"/>
             <a:chOff x="0" y="0"/>
-            <a:chExt cx="7013090" cy="9661322"/>
+            <a:chExt cx="6444731" cy="9661322"/>
           </a:xfrm>
         </p:grpSpPr>
         <p:grpSp>
@@ -7469,9 +7969,9 @@
           <p:grpSpPr>
             <a:xfrm rot="0">
               <a:off x="0" y="0"/>
-              <a:ext cx="6997080" cy="9661322"/>
+              <a:ext cx="6430019" cy="9661322"/>
               <a:chOff x="0" y="0"/>
-              <a:chExt cx="1341464" cy="1852246"/>
+              <a:chExt cx="1232748" cy="1852246"/>
             </a:xfrm>
           </p:grpSpPr>
           <p:sp>
@@ -7483,7 +7983,7 @@
             <p:spPr>
               <a:xfrm flipH="false" flipV="false" rot="0">
                 <a:off x="0" y="0"/>
-                <a:ext cx="1341464" cy="1852246"/>
+                <a:ext cx="1232748" cy="1852246"/>
               </a:xfrm>
               <a:custGeom>
                 <a:avLst/>
@@ -7492,41 +7992,61 @@
                 <a:cxnLst/>
                 <a:rect r="r" b="b" t="t" l="l"/>
                 <a:pathLst>
-                  <a:path h="1852246" w="1341464">
+                  <a:path h="1852246" w="1232748">
                     <a:moveTo>
-                      <a:pt x="75239" y="0"/>
+                      <a:pt x="81874" y="0"/>
                     </a:moveTo>
                     <a:lnTo>
-                      <a:pt x="1266225" y="0"/>
+                      <a:pt x="1150874" y="0"/>
                     </a:lnTo>
                     <a:cubicBezTo>
-                      <a:pt x="1307779" y="0"/>
-                      <a:pt x="1341464" y="33685"/>
-                      <a:pt x="1341464" y="75239"/>
+                      <a:pt x="1172589" y="0"/>
+                      <a:pt x="1193414" y="8626"/>
+                      <a:pt x="1208768" y="23980"/>
+                    </a:cubicBezTo>
+                    <a:cubicBezTo>
+                      <a:pt x="1224122" y="39335"/>
+                      <a:pt x="1232748" y="60160"/>
+                      <a:pt x="1232748" y="81874"/>
                     </a:cubicBezTo>
                     <a:lnTo>
-                      <a:pt x="1341464" y="1777008"/>
+                      <a:pt x="1232748" y="1770372"/>
                     </a:lnTo>
                     <a:cubicBezTo>
-                      <a:pt x="1341464" y="1818561"/>
-                      <a:pt x="1307779" y="1852246"/>
-                      <a:pt x="1266225" y="1852246"/>
+                      <a:pt x="1232748" y="1792087"/>
+                      <a:pt x="1224122" y="1812912"/>
+                      <a:pt x="1208768" y="1828266"/>
+                    </a:cubicBezTo>
+                    <a:cubicBezTo>
+                      <a:pt x="1193414" y="1843620"/>
+                      <a:pt x="1172589" y="1852246"/>
+                      <a:pt x="1150874" y="1852246"/>
                     </a:cubicBezTo>
                     <a:lnTo>
-                      <a:pt x="75239" y="1852246"/>
+                      <a:pt x="81874" y="1852246"/>
                     </a:lnTo>
                     <a:cubicBezTo>
-                      <a:pt x="33685" y="1852246"/>
-                      <a:pt x="0" y="1818561"/>
-                      <a:pt x="0" y="1777008"/>
+                      <a:pt x="60160" y="1852246"/>
+                      <a:pt x="39335" y="1843620"/>
+                      <a:pt x="23980" y="1828266"/>
+                    </a:cubicBezTo>
+                    <a:cubicBezTo>
+                      <a:pt x="8626" y="1812912"/>
+                      <a:pt x="0" y="1792087"/>
+                      <a:pt x="0" y="1770372"/>
                     </a:cubicBezTo>
                     <a:lnTo>
-                      <a:pt x="0" y="75239"/>
+                      <a:pt x="0" y="81874"/>
                     </a:lnTo>
                     <a:cubicBezTo>
-                      <a:pt x="0" y="33685"/>
-                      <a:pt x="33685" y="0"/>
-                      <a:pt x="75239" y="0"/>
+                      <a:pt x="0" y="60160"/>
+                      <a:pt x="8626" y="39335"/>
+                      <a:pt x="23980" y="23980"/>
+                    </a:cubicBezTo>
+                    <a:cubicBezTo>
+                      <a:pt x="39335" y="8626"/>
+                      <a:pt x="60160" y="0"/>
+                      <a:pt x="81874" y="0"/>
                     </a:cubicBezTo>
                     <a:close/>
                   </a:path>
@@ -7550,7 +8070,7 @@
             <p:spPr>
               <a:xfrm>
                 <a:off x="0" y="-66675"/>
-                <a:ext cx="1341464" cy="1918921"/>
+                <a:ext cx="1232748" cy="1918921"/>
               </a:xfrm>
               <a:prstGeom prst="rect">
                 <a:avLst/>
@@ -7577,8 +8097,8 @@
           </p:nvSpPr>
           <p:spPr>
             <a:xfrm rot="0">
-              <a:off x="890493" y="735769"/>
-              <a:ext cx="5248113" cy="1183269"/>
+              <a:off x="818325" y="735769"/>
+              <a:ext cx="4822792" cy="1183269"/>
             </a:xfrm>
             <a:prstGeom prst="rect">
               <a:avLst/>
@@ -7618,8 +8138,8 @@
           </p:nvSpPr>
           <p:spPr>
             <a:xfrm rot="0">
-              <a:off x="395137" y="3298072"/>
-              <a:ext cx="6238825" cy="955659"/>
+              <a:off x="348402" y="4513340"/>
+              <a:ext cx="5733214" cy="905149"/>
             </a:xfrm>
             <a:prstGeom prst="rect">
               <a:avLst/>
@@ -7633,11 +8153,11 @@
             <a:p>
               <a:pPr algn="just">
                 <a:lnSpc>
-                  <a:spcPts val="2884"/>
+                  <a:spcPts val="2744"/>
                 </a:lnSpc>
               </a:pPr>
               <a:r>
-                <a:rPr lang="en-US" sz="2060">
+                <a:rPr lang="en-US" sz="1960">
                   <a:solidFill>
                     <a:srgbClr val="FFFFFF"/>
                   </a:solidFill>
@@ -7652,7 +8172,7 @@
             <a:p>
               <a:pPr algn="just">
                 <a:lnSpc>
-                  <a:spcPts val="2884"/>
+                  <a:spcPts val="2744"/>
                 </a:lnSpc>
                 <a:spcBef>
                   <a:spcPct val="0"/>
@@ -7669,8 +8189,8 @@
           </p:nvSpPr>
           <p:spPr>
             <a:xfrm>
-              <a:off x="16009" y="2929713"/>
-              <a:ext cx="6997080" cy="0"/>
+              <a:off x="14712" y="2929713"/>
+              <a:ext cx="6430019" cy="0"/>
             </a:xfrm>
             <a:prstGeom prst="line">
               <a:avLst/>
@@ -7693,8 +8213,8 @@
           </p:nvSpPr>
           <p:spPr>
             <a:xfrm rot="0">
-              <a:off x="395137" y="4187056"/>
-              <a:ext cx="6238825" cy="1408641"/>
+              <a:off x="363114" y="5067637"/>
+              <a:ext cx="5733214" cy="1326303"/>
             </a:xfrm>
             <a:prstGeom prst="rect">
               <a:avLst/>
@@ -7708,14 +8228,14 @@
             <a:p>
               <a:pPr algn="l">
                 <a:lnSpc>
-                  <a:spcPts val="2800"/>
+                  <a:spcPts val="2660"/>
                 </a:lnSpc>
                 <a:spcBef>
                   <a:spcPct val="0"/>
                 </a:spcBef>
               </a:pPr>
               <a:r>
-                <a:rPr lang="en-US" sz="2000">
+                <a:rPr lang="en-US" sz="1900">
                   <a:solidFill>
                     <a:srgbClr val="FFFFFF"/>
                   </a:solidFill>
@@ -7730,14 +8250,14 @@
             <a:p>
               <a:pPr algn="l">
                 <a:lnSpc>
-                  <a:spcPts val="2800"/>
+                  <a:spcPts val="2660"/>
                 </a:lnSpc>
                 <a:spcBef>
                   <a:spcPct val="0"/>
                 </a:spcBef>
               </a:pPr>
               <a:r>
-                <a:rPr lang="en-US" sz="2000">
+                <a:rPr lang="en-US" sz="1900">
                   <a:solidFill>
                     <a:srgbClr val="FFFFFF"/>
                   </a:solidFill>
@@ -7752,14 +8272,14 @@
             <a:p>
               <a:pPr algn="l">
                 <a:lnSpc>
-                  <a:spcPts val="2800"/>
+                  <a:spcPts val="2660"/>
                 </a:lnSpc>
                 <a:spcBef>
                   <a:spcPct val="0"/>
                 </a:spcBef>
               </a:pPr>
               <a:r>
-                <a:rPr lang="en-US" sz="2000">
+                <a:rPr lang="en-US" sz="1900">
                   <a:solidFill>
                     <a:srgbClr val="FFFFFF"/>
                   </a:solidFill>
@@ -7781,8 +8301,8 @@
           </p:nvSpPr>
           <p:spPr>
             <a:xfrm rot="0">
-              <a:off x="395137" y="5910022"/>
-              <a:ext cx="6238825" cy="2818341"/>
+              <a:off x="363114" y="6884916"/>
+              <a:ext cx="5733214" cy="2659803"/>
             </a:xfrm>
             <a:prstGeom prst="rect">
               <a:avLst/>
@@ -7796,11 +8316,11 @@
             <a:p>
               <a:pPr algn="l">
                 <a:lnSpc>
-                  <a:spcPts val="2800"/>
+                  <a:spcPts val="2660"/>
                 </a:lnSpc>
               </a:pPr>
               <a:r>
-                <a:rPr lang="en-US" sz="2000">
+                <a:rPr lang="en-US" sz="1900">
                   <a:solidFill>
                     <a:srgbClr val="FFFFFF"/>
                   </a:solidFill>
@@ -7812,7 +8332,7 @@
                 <a:t>Pola ini menunjukkan proses pembentukan koneksi TCP berhasil dilakukan. S</a:t>
               </a:r>
               <a:r>
-                <a:rPr lang="en-US" sz="2000">
+                <a:rPr lang="en-US" sz="1900">
                   <a:solidFill>
                     <a:srgbClr val="FFFFFF"/>
                   </a:solidFill>
@@ -7827,7 +8347,58 @@
             <a:p>
               <a:pPr algn="l">
                 <a:lnSpc>
-                  <a:spcPts val="2800"/>
+                  <a:spcPts val="2660"/>
+                </a:lnSpc>
+                <a:spcBef>
+                  <a:spcPct val="0"/>
+                </a:spcBef>
+              </a:pPr>
+            </a:p>
+          </p:txBody>
+        </p:sp>
+        <p:sp>
+          <p:nvSpPr>
+            <p:cNvPr name="TextBox 24" id="24"/>
+            <p:cNvSpPr txBox="true"/>
+            <p:nvPr/>
+          </p:nvSpPr>
+          <p:spPr>
+            <a:xfrm rot="0">
+              <a:off x="348402" y="3250358"/>
+              <a:ext cx="5733214" cy="1326303"/>
+            </a:xfrm>
+            <a:prstGeom prst="rect">
+              <a:avLst/>
+            </a:prstGeom>
+          </p:spPr>
+          <p:txBody>
+            <a:bodyPr anchor="t" rtlCol="false" tIns="0" lIns="0" bIns="0" rIns="0">
+              <a:spAutoFit/>
+            </a:bodyPr>
+            <a:lstStyle/>
+            <a:p>
+              <a:pPr algn="l">
+                <a:lnSpc>
+                  <a:spcPts val="2660"/>
+                </a:lnSpc>
+              </a:pPr>
+              <a:r>
+                <a:rPr lang="en-US" sz="1900">
+                  <a:solidFill>
+                    <a:srgbClr val="FFFFFF"/>
+                  </a:solidFill>
+                  <a:latin typeface="Poppins"/>
+                  <a:ea typeface="Poppins"/>
+                  <a:cs typeface="Poppins"/>
+                  <a:sym typeface="Poppins"/>
+                </a:rPr>
+                <a:t>Menggunakan port 443 karena ini adalah port standar untuk HTTPS. </a:t>
+              </a:r>
+            </a:p>
+            <a:p>
+              <a:pPr algn="l">
+                <a:lnSpc>
+                  <a:spcPts val="2660"/>
                 </a:lnSpc>
                 <a:spcBef>
                   <a:spcPct val="0"/>
@@ -7839,42 +8410,42 @@
       </p:grpSp>
       <p:grpSp>
         <p:nvGrpSpPr>
-          <p:cNvPr name="Group 24" id="24"/>
+          <p:cNvPr name="Group 25" id="25"/>
           <p:cNvGrpSpPr/>
           <p:nvPr/>
         </p:nvGrpSpPr>
         <p:grpSpPr>
           <a:xfrm rot="0">
-            <a:off x="12692560" y="2012308"/>
-            <a:ext cx="5259817" cy="7245992"/>
+            <a:off x="12196498" y="2012308"/>
+            <a:ext cx="5062802" cy="7245992"/>
             <a:chOff x="0" y="0"/>
-            <a:chExt cx="7013090" cy="9661322"/>
+            <a:chExt cx="6750403" cy="9661322"/>
           </a:xfrm>
         </p:grpSpPr>
         <p:grpSp>
           <p:nvGrpSpPr>
-            <p:cNvPr name="Group 25" id="25"/>
+            <p:cNvPr name="Group 26" id="26"/>
             <p:cNvGrpSpPr/>
             <p:nvPr/>
           </p:nvGrpSpPr>
           <p:grpSpPr>
             <a:xfrm rot="0">
               <a:off x="0" y="0"/>
-              <a:ext cx="6997080" cy="9661322"/>
+              <a:ext cx="6734993" cy="9661322"/>
               <a:chOff x="0" y="0"/>
-              <a:chExt cx="1341464" cy="1852246"/>
+              <a:chExt cx="1291217" cy="1852246"/>
             </a:xfrm>
           </p:grpSpPr>
           <p:sp>
             <p:nvSpPr>
-              <p:cNvPr name="Freeform 26" id="26"/>
+              <p:cNvPr name="Freeform 27" id="27"/>
               <p:cNvSpPr/>
               <p:nvPr/>
             </p:nvSpPr>
             <p:spPr>
               <a:xfrm flipH="false" flipV="false" rot="0">
                 <a:off x="0" y="0"/>
-                <a:ext cx="1341464" cy="1852246"/>
+                <a:ext cx="1291217" cy="1852246"/>
               </a:xfrm>
               <a:custGeom>
                 <a:avLst/>
@@ -7883,41 +8454,61 @@
                 <a:cxnLst/>
                 <a:rect r="r" b="b" t="t" l="l"/>
                 <a:pathLst>
-                  <a:path h="1852246" w="1341464">
+                  <a:path h="1852246" w="1291217">
                     <a:moveTo>
-                      <a:pt x="75239" y="0"/>
+                      <a:pt x="78166" y="0"/>
                     </a:moveTo>
                     <a:lnTo>
-                      <a:pt x="1266225" y="0"/>
+                      <a:pt x="1213051" y="0"/>
                     </a:lnTo>
                     <a:cubicBezTo>
-                      <a:pt x="1307779" y="0"/>
-                      <a:pt x="1341464" y="33685"/>
-                      <a:pt x="1341464" y="75239"/>
+                      <a:pt x="1233782" y="0"/>
+                      <a:pt x="1253664" y="8235"/>
+                      <a:pt x="1268323" y="22894"/>
+                    </a:cubicBezTo>
+                    <a:cubicBezTo>
+                      <a:pt x="1282982" y="37553"/>
+                      <a:pt x="1291217" y="57435"/>
+                      <a:pt x="1291217" y="78166"/>
                     </a:cubicBezTo>
                     <a:lnTo>
-                      <a:pt x="1341464" y="1777008"/>
+                      <a:pt x="1291217" y="1774080"/>
                     </a:lnTo>
                     <a:cubicBezTo>
-                      <a:pt x="1341464" y="1818561"/>
-                      <a:pt x="1307779" y="1852246"/>
-                      <a:pt x="1266225" y="1852246"/>
+                      <a:pt x="1291217" y="1794811"/>
+                      <a:pt x="1282982" y="1814693"/>
+                      <a:pt x="1268323" y="1829352"/>
+                    </a:cubicBezTo>
+                    <a:cubicBezTo>
+                      <a:pt x="1253664" y="1844011"/>
+                      <a:pt x="1233782" y="1852246"/>
+                      <a:pt x="1213051" y="1852246"/>
                     </a:cubicBezTo>
                     <a:lnTo>
-                      <a:pt x="75239" y="1852246"/>
+                      <a:pt x="78166" y="1852246"/>
                     </a:lnTo>
                     <a:cubicBezTo>
-                      <a:pt x="33685" y="1852246"/>
-                      <a:pt x="0" y="1818561"/>
-                      <a:pt x="0" y="1777008"/>
+                      <a:pt x="57435" y="1852246"/>
+                      <a:pt x="37553" y="1844011"/>
+                      <a:pt x="22894" y="1829352"/>
+                    </a:cubicBezTo>
+                    <a:cubicBezTo>
+                      <a:pt x="8235" y="1814693"/>
+                      <a:pt x="0" y="1794811"/>
+                      <a:pt x="0" y="1774080"/>
                     </a:cubicBezTo>
                     <a:lnTo>
-                      <a:pt x="0" y="75239"/>
+                      <a:pt x="0" y="78166"/>
                     </a:lnTo>
                     <a:cubicBezTo>
-                      <a:pt x="0" y="33685"/>
-                      <a:pt x="33685" y="0"/>
-                      <a:pt x="75239" y="0"/>
+                      <a:pt x="0" y="57435"/>
+                      <a:pt x="8235" y="37553"/>
+                      <a:pt x="22894" y="22894"/>
+                    </a:cubicBezTo>
+                    <a:cubicBezTo>
+                      <a:pt x="37553" y="8235"/>
+                      <a:pt x="57435" y="0"/>
+                      <a:pt x="78166" y="0"/>
                     </a:cubicBezTo>
                     <a:close/>
                   </a:path>
@@ -7934,14 +8525,14 @@
           </p:sp>
           <p:sp>
             <p:nvSpPr>
-              <p:cNvPr name="TextBox 27" id="27"/>
+              <p:cNvPr name="TextBox 28" id="28"/>
               <p:cNvSpPr txBox="true"/>
               <p:nvPr/>
             </p:nvSpPr>
             <p:spPr>
               <a:xfrm>
                 <a:off x="0" y="-66675"/>
-                <a:ext cx="1341464" cy="1918921"/>
+                <a:ext cx="1291217" cy="1918921"/>
               </a:xfrm>
               <a:prstGeom prst="rect">
                 <a:avLst/>
@@ -7962,14 +8553,14 @@
         </p:grpSp>
         <p:sp>
           <p:nvSpPr>
-            <p:cNvPr name="TextBox 28" id="28"/>
+            <p:cNvPr name="TextBox 29" id="29"/>
             <p:cNvSpPr txBox="true"/>
             <p:nvPr/>
           </p:nvSpPr>
           <p:spPr>
             <a:xfrm rot="0">
-              <a:off x="890493" y="735769"/>
-              <a:ext cx="5248113" cy="1785183"/>
+              <a:off x="857138" y="735769"/>
+              <a:ext cx="5051536" cy="1183269"/>
             </a:xfrm>
             <a:prstGeom prst="rect">
               <a:avLst/>
@@ -7996,77 +8587,7 @@
                   <a:cs typeface="Poppins Bold"/>
                   <a:sym typeface="Poppins Bold"/>
                 </a:rPr>
-                <a:t>Komunikasi Menggunakan HTTPS (TLS)</a:t>
-              </a:r>
-            </a:p>
-          </p:txBody>
-        </p:sp>
-        <p:sp>
-          <p:nvSpPr>
-            <p:cNvPr name="TextBox 29" id="29"/>
-            <p:cNvSpPr txBox="true"/>
-            <p:nvPr/>
-          </p:nvSpPr>
-          <p:spPr>
-            <a:xfrm rot="0">
-              <a:off x="395137" y="3298072"/>
-              <a:ext cx="6238825" cy="3376400"/>
-            </a:xfrm>
-            <a:prstGeom prst="rect">
-              <a:avLst/>
-            </a:prstGeom>
-          </p:spPr>
-          <p:txBody>
-            <a:bodyPr anchor="t" rtlCol="false" tIns="0" lIns="0" bIns="0" rIns="0">
-              <a:spAutoFit/>
-            </a:bodyPr>
-            <a:lstStyle/>
-            <a:p>
-              <a:pPr algn="just">
-                <a:lnSpc>
-                  <a:spcPts val="2884"/>
-                </a:lnSpc>
-              </a:pPr>
-              <a:r>
-                <a:rPr lang="en-US" sz="2060">
-                  <a:solidFill>
-                    <a:srgbClr val="FFFFFF"/>
-                  </a:solidFill>
-                  <a:latin typeface="Poppins"/>
-                  <a:ea typeface="Poppins"/>
-                  <a:cs typeface="Poppins"/>
-                  <a:sym typeface="Poppins"/>
-                </a:rPr>
-                <a:t>Terlihat paket TLSv1.2 dan TLSv1.3 seperti Client Hello dan Server Hello.</a:t>
-              </a:r>
-            </a:p>
-            <a:p>
-              <a:pPr algn="just">
-                <a:lnSpc>
-                  <a:spcPts val="2884"/>
-                </a:lnSpc>
-              </a:pPr>
-            </a:p>
-            <a:p>
-              <a:pPr algn="just">
-                <a:lnSpc>
-                  <a:spcPts val="2884"/>
-                </a:lnSpc>
-                <a:spcBef>
-                  <a:spcPct val="0"/>
-                </a:spcBef>
-              </a:pPr>
-              <a:r>
-                <a:rPr lang="en-US" sz="2060">
-                  <a:solidFill>
-                    <a:srgbClr val="FFFFFF"/>
-                  </a:solidFill>
-                  <a:latin typeface="Poppins"/>
-                  <a:ea typeface="Poppins"/>
-                  <a:cs typeface="Poppins"/>
-                  <a:sym typeface="Poppins"/>
-                </a:rPr>
-                <a:t>Data API dikirim melalui HTTPS sehingga isi request dan response terenkripsi dan tidak dapat dibaca langsung oleh pihak lain.</a:t>
+                <a:t>HTTPS yang Tidak Terbaca</a:t>
               </a:r>
             </a:p>
           </p:txBody>
@@ -8079,8 +8600,8 @@
           </p:nvSpPr>
           <p:spPr>
             <a:xfrm>
-              <a:off x="16009" y="2929713"/>
-              <a:ext cx="6997080" cy="0"/>
+              <a:off x="15410" y="2929713"/>
+              <a:ext cx="6734993" cy="0"/>
             </a:xfrm>
             <a:prstGeom prst="line">
               <a:avLst/>
@@ -8094,6 +8615,89 @@
               <a:tailEnd type="none" len="sm" w="sm"/>
             </a:ln>
           </p:spPr>
+        </p:sp>
+        <p:sp>
+          <p:nvSpPr>
+            <p:cNvPr name="TextBox 31" id="31"/>
+            <p:cNvSpPr txBox="true"/>
+            <p:nvPr/>
+          </p:nvSpPr>
+          <p:spPr>
+            <a:xfrm rot="0">
+              <a:off x="380337" y="4196581"/>
+              <a:ext cx="6005139" cy="437303"/>
+            </a:xfrm>
+            <a:prstGeom prst="rect">
+              <a:avLst/>
+            </a:prstGeom>
+          </p:spPr>
+          <p:txBody>
+            <a:bodyPr anchor="t" rtlCol="false" tIns="0" lIns="0" bIns="0" rIns="0">
+              <a:spAutoFit/>
+            </a:bodyPr>
+            <a:lstStyle/>
+            <a:p>
+              <a:pPr algn="l">
+                <a:lnSpc>
+                  <a:spcPts val="2660"/>
+                </a:lnSpc>
+                <a:spcBef>
+                  <a:spcPct val="0"/>
+                </a:spcBef>
+              </a:pPr>
+            </a:p>
+          </p:txBody>
+        </p:sp>
+        <p:sp>
+          <p:nvSpPr>
+            <p:cNvPr name="TextBox 32" id="32"/>
+            <p:cNvSpPr txBox="true"/>
+            <p:nvPr/>
+          </p:nvSpPr>
+          <p:spPr>
+            <a:xfrm rot="0">
+              <a:off x="380337" y="3559392"/>
+              <a:ext cx="6005139" cy="4882303"/>
+            </a:xfrm>
+            <a:prstGeom prst="rect">
+              <a:avLst/>
+            </a:prstGeom>
+          </p:spPr>
+          <p:txBody>
+            <a:bodyPr anchor="t" rtlCol="false" tIns="0" lIns="0" bIns="0" rIns="0">
+              <a:spAutoFit/>
+            </a:bodyPr>
+            <a:lstStyle/>
+            <a:p>
+              <a:pPr algn="l">
+                <a:lnSpc>
+                  <a:spcPts val="2660"/>
+                </a:lnSpc>
+              </a:pPr>
+              <a:r>
+                <a:rPr lang="en-US" sz="1900">
+                  <a:solidFill>
+                    <a:srgbClr val="FFFFFF"/>
+                  </a:solidFill>
+                  <a:latin typeface="Poppins"/>
+                  <a:ea typeface="Poppins"/>
+                  <a:cs typeface="Poppins"/>
+                  <a:sym typeface="Poppins"/>
+                </a:rPr>
+                <a:t>Paket TLSv1.2 dengan port 443 menunjukkan komunikasi menggunakan HTTPS. Pada Wireshark hanya terlihat "Application Data" dan isi request maupun response tidak dapat dibaca secara langsung. Hal ini terjadi karena data telah dienkripsi oleh TLS untuk menjaga keamanan komunikasi antara client dan server.</a:t>
+              </a:r>
+            </a:p>
+            <a:p>
+              <a:pPr algn="l">
+                <a:lnSpc>
+                  <a:spcPts val="2660"/>
+                </a:lnSpc>
+                <a:spcBef>
+                  <a:spcPct val="0"/>
+                </a:spcBef>
+              </a:pPr>
+            </a:p>
+          </p:txBody>
         </p:sp>
       </p:grpSp>
     </p:spTree>
@@ -9866,53 +10470,7 @@
       </p:grpSp>
       <p:sp>
         <p:nvSpPr>
-          <p:cNvPr name="Freeform 6" id="6"/>
-          <p:cNvSpPr/>
-          <p:nvPr/>
-        </p:nvSpPr>
-        <p:spPr>
-          <a:xfrm flipH="false" flipV="false" rot="0">
-            <a:off x="8893169" y="4716470"/>
-            <a:ext cx="8586980" cy="3535815"/>
-          </a:xfrm>
-          <a:custGeom>
-            <a:avLst/>
-            <a:gdLst/>
-            <a:ahLst/>
-            <a:cxnLst/>
-            <a:rect r="r" b="b" t="t" l="l"/>
-            <a:pathLst>
-              <a:path h="3535815" w="8586980">
-                <a:moveTo>
-                  <a:pt x="0" y="0"/>
-                </a:moveTo>
-                <a:lnTo>
-                  <a:pt x="8586980" y="0"/>
-                </a:lnTo>
-                <a:lnTo>
-                  <a:pt x="8586980" y="3535815"/>
-                </a:lnTo>
-                <a:lnTo>
-                  <a:pt x="0" y="3535815"/>
-                </a:lnTo>
-                <a:lnTo>
-                  <a:pt x="0" y="0"/>
-                </a:lnTo>
-                <a:close/>
-              </a:path>
-            </a:pathLst>
-          </a:custGeom>
-          <a:blipFill>
-            <a:blip r:embed="rId3"/>
-            <a:stretch>
-              <a:fillRect l="-35708" t="-202553" r="-112578" b="-17780"/>
-            </a:stretch>
-          </a:blipFill>
-        </p:spPr>
-      </p:sp>
-      <p:sp>
-        <p:nvSpPr>
-          <p:cNvPr name="TextBox 7" id="7"/>
+          <p:cNvPr name="TextBox 6" id="6"/>
           <p:cNvSpPr txBox="true"/>
           <p:nvPr/>
         </p:nvSpPr>
@@ -9953,7 +10511,7 @@
       </p:sp>
       <p:sp>
         <p:nvSpPr>
-          <p:cNvPr name="TextBox 8" id="8"/>
+          <p:cNvPr name="TextBox 7" id="7"/>
           <p:cNvSpPr txBox="true"/>
           <p:nvPr/>
         </p:nvSpPr>
@@ -9997,14 +10555,14 @@
       </p:sp>
       <p:sp>
         <p:nvSpPr>
-          <p:cNvPr name="TextBox 9" id="9"/>
+          <p:cNvPr name="TextBox 8" id="8"/>
           <p:cNvSpPr txBox="true"/>
           <p:nvPr/>
         </p:nvSpPr>
         <p:spPr>
           <a:xfrm rot="0">
-            <a:off x="739531" y="4017982"/>
-            <a:ext cx="7641580" cy="4384675"/>
+            <a:off x="9906889" y="3428964"/>
+            <a:ext cx="7641580" cy="4822825"/>
           </a:xfrm>
           <a:prstGeom prst="rect">
             <a:avLst/>
@@ -10145,7 +10703,7 @@
                 <a:cs typeface="Poppins"/>
                 <a:sym typeface="Poppins"/>
               </a:rPr>
-              <a:t>print(df[["id", "name", "username", "email"]])</a:t>
+              <a:t>print(df[["id", "name", "username", "email",”address”,”phone”]])</a:t>
             </a:r>
           </a:p>
           <a:p>
@@ -10200,13 +10758,13 @@
       </p:sp>
       <p:sp>
         <p:nvSpPr>
-          <p:cNvPr name="TextBox 10" id="10"/>
+          <p:cNvPr name="TextBox 9" id="9"/>
           <p:cNvSpPr txBox="true"/>
           <p:nvPr/>
         </p:nvSpPr>
         <p:spPr>
           <a:xfrm rot="0">
-            <a:off x="8535721" y="4017982"/>
+            <a:off x="739531" y="3422531"/>
             <a:ext cx="1909018" cy="441325"/>
           </a:xfrm>
           <a:prstGeom prst="rect">
@@ -10237,10 +10795,56 @@
                 <a:cs typeface="Poppins Bold"/>
                 <a:sym typeface="Poppins Bold"/>
               </a:rPr>
-              <a:t>Output :</a:t>
+              <a:t>Data JSON :</a:t>
             </a:r>
           </a:p>
         </p:txBody>
+      </p:sp>
+      <p:sp>
+        <p:nvSpPr>
+          <p:cNvPr name="Freeform 10" id="10"/>
+          <p:cNvSpPr/>
+          <p:nvPr/>
+        </p:nvSpPr>
+        <p:spPr>
+          <a:xfrm flipH="false" flipV="false" rot="0">
+            <a:off x="739531" y="4015165"/>
+            <a:ext cx="7384706" cy="5243135"/>
+          </a:xfrm>
+          <a:custGeom>
+            <a:avLst/>
+            <a:gdLst/>
+            <a:ahLst/>
+            <a:cxnLst/>
+            <a:rect r="r" b="b" t="t" l="l"/>
+            <a:pathLst>
+              <a:path h="5243135" w="7384706">
+                <a:moveTo>
+                  <a:pt x="0" y="0"/>
+                </a:moveTo>
+                <a:lnTo>
+                  <a:pt x="7384706" y="0"/>
+                </a:lnTo>
+                <a:lnTo>
+                  <a:pt x="7384706" y="5243135"/>
+                </a:lnTo>
+                <a:lnTo>
+                  <a:pt x="0" y="5243135"/>
+                </a:lnTo>
+                <a:lnTo>
+                  <a:pt x="0" y="0"/>
+                </a:lnTo>
+                <a:close/>
+              </a:path>
+            </a:pathLst>
+          </a:custGeom>
+          <a:blipFill>
+            <a:blip r:embed="rId3"/>
+            <a:stretch>
+              <a:fillRect l="-16839" t="-5937" r="0" b="0"/>
+            </a:stretch>
+          </a:blipFill>
+        </p:spPr>
       </p:sp>
     </p:spTree>
   </p:cSld>
@@ -10313,104 +10917,9 @@
           </a:blipFill>
         </p:spPr>
       </p:sp>
-      <p:sp>
-        <p:nvSpPr>
-          <p:cNvPr name="TextBox 3" id="3"/>
-          <p:cNvSpPr txBox="true"/>
-          <p:nvPr/>
-        </p:nvSpPr>
-        <p:spPr>
-          <a:xfrm rot="0">
-            <a:off x="1369309" y="2224743"/>
-            <a:ext cx="15889991" cy="1682114"/>
-          </a:xfrm>
-          <a:prstGeom prst="rect">
-            <a:avLst/>
-          </a:prstGeom>
-        </p:spPr>
-        <p:txBody>
-          <a:bodyPr anchor="t" rtlCol="false" tIns="0" lIns="0" bIns="0" rIns="0">
-            <a:spAutoFit/>
-          </a:bodyPr>
-          <a:lstStyle/>
-          <a:p>
-            <a:pPr algn="l">
-              <a:lnSpc>
-                <a:spcPts val="3360"/>
-              </a:lnSpc>
-            </a:pPr>
-            <a:r>
-              <a:rPr lang="en-US" sz="2400">
-                <a:solidFill>
-                  <a:srgbClr val="FFFFFF"/>
-                </a:solidFill>
-                <a:latin typeface="Poppins"/>
-                <a:ea typeface="Poppins"/>
-                <a:cs typeface="Poppins"/>
-                <a:sym typeface="Poppins"/>
-              </a:rPr>
-              <a:t>Traffic awal cukup banyak sehingga paket yang relevan sulit ditemukan. Solusi yang digunakan adalah menerapkan filter dns dan tls pada Wireshark sehingga paket yang berkaitan dengan komunikasi API dapat diidentifikasi dengan lebih mudah.</a:t>
-            </a:r>
-          </a:p>
-          <a:p>
-            <a:pPr algn="l">
-              <a:lnSpc>
-                <a:spcPts val="3360"/>
-              </a:lnSpc>
-              <a:spcBef>
-                <a:spcPct val="0"/>
-              </a:spcBef>
-            </a:pPr>
-          </a:p>
-        </p:txBody>
-      </p:sp>
-      <p:sp>
-        <p:nvSpPr>
-          <p:cNvPr name="TextBox 4" id="4"/>
-          <p:cNvSpPr txBox="true"/>
-          <p:nvPr/>
-        </p:nvSpPr>
-        <p:spPr>
-          <a:xfrm rot="0">
-            <a:off x="1168678" y="847725"/>
-            <a:ext cx="6872497" cy="1095375"/>
-          </a:xfrm>
-          <a:prstGeom prst="rect">
-            <a:avLst/>
-          </a:prstGeom>
-        </p:spPr>
-        <p:txBody>
-          <a:bodyPr anchor="t" rtlCol="false" tIns="0" lIns="0" bIns="0" rIns="0">
-            <a:spAutoFit/>
-          </a:bodyPr>
-          <a:lstStyle/>
-          <a:p>
-            <a:pPr algn="ctr" marL="0" indent="0" lvl="1">
-              <a:lnSpc>
-                <a:spcPts val="8400"/>
-              </a:lnSpc>
-              <a:spcBef>
-                <a:spcPct val="0"/>
-              </a:spcBef>
-            </a:pPr>
-            <a:r>
-              <a:rPr lang="en-US" b="true" sz="6000">
-                <a:solidFill>
-                  <a:srgbClr val="FFFFFF"/>
-                </a:solidFill>
-                <a:latin typeface="Poppins Bold"/>
-                <a:ea typeface="Poppins Bold"/>
-                <a:cs typeface="Poppins Bold"/>
-                <a:sym typeface="Poppins Bold"/>
-              </a:rPr>
-              <a:t>Troubleshooting</a:t>
-            </a:r>
-          </a:p>
-        </p:txBody>
-      </p:sp>
       <p:grpSp>
         <p:nvGrpSpPr>
-          <p:cNvPr name="Group 5" id="5"/>
+          <p:cNvPr name="Group 3" id="3"/>
           <p:cNvGrpSpPr/>
           <p:nvPr/>
         </p:nvGrpSpPr>
@@ -10424,7 +10933,7 @@
         </p:grpSpPr>
         <p:sp>
           <p:nvSpPr>
-            <p:cNvPr name="Freeform 6" id="6"/>
+            <p:cNvPr name="Freeform 4" id="4"/>
             <p:cNvSpPr/>
             <p:nvPr/>
           </p:nvSpPr>
@@ -10464,7 +10973,7 @@
         </p:sp>
         <p:sp>
           <p:nvSpPr>
-            <p:cNvPr name="TextBox 7" id="7"/>
+            <p:cNvPr name="TextBox 5" id="5"/>
             <p:cNvSpPr txBox="true"/>
             <p:nvPr/>
           </p:nvSpPr>
@@ -10495,118 +11004,14 @@
       </p:grpSp>
       <p:sp>
         <p:nvSpPr>
-          <p:cNvPr name="Freeform 8" id="8"/>
-          <p:cNvSpPr/>
-          <p:nvPr/>
-        </p:nvSpPr>
-        <p:spPr>
-          <a:xfrm flipH="false" flipV="false" rot="0">
-            <a:off x="16255366" y="769755"/>
-            <a:ext cx="860834" cy="1002427"/>
-          </a:xfrm>
-          <a:custGeom>
-            <a:avLst/>
-            <a:gdLst/>
-            <a:ahLst/>
-            <a:cxnLst/>
-            <a:rect r="r" b="b" t="t" l="l"/>
-            <a:pathLst>
-              <a:path h="1002427" w="860834">
-                <a:moveTo>
-                  <a:pt x="0" y="0"/>
-                </a:moveTo>
-                <a:lnTo>
-                  <a:pt x="860835" y="0"/>
-                </a:lnTo>
-                <a:lnTo>
-                  <a:pt x="860835" y="1002428"/>
-                </a:lnTo>
-                <a:lnTo>
-                  <a:pt x="0" y="1002428"/>
-                </a:lnTo>
-                <a:lnTo>
-                  <a:pt x="0" y="0"/>
-                </a:lnTo>
-                <a:close/>
-              </a:path>
-            </a:pathLst>
-          </a:custGeom>
-          <a:blipFill>
-            <a:blip r:embed="rId3">
-              <a:extLst>
-                <a:ext uri="{96DAC541-7B7A-43D3-8B79-37D633B846F1}">
-                  <asvg:svgBlip xmlns:asvg="http://schemas.microsoft.com/office/drawing/2016/SVG/main" r:embed="rId4"/>
-                </a:ext>
-              </a:extLst>
-            </a:blip>
-            <a:stretch>
-              <a:fillRect l="0" t="0" r="0" b="0"/>
-            </a:stretch>
-          </a:blipFill>
-        </p:spPr>
-      </p:sp>
-      <p:sp>
-        <p:nvSpPr>
-          <p:cNvPr name="Freeform 9" id="9"/>
-          <p:cNvSpPr/>
-          <p:nvPr/>
-        </p:nvSpPr>
-        <p:spPr>
-          <a:xfrm flipH="false" flipV="false" rot="0">
-            <a:off x="-230871" y="1028700"/>
-            <a:ext cx="860834" cy="1002427"/>
-          </a:xfrm>
-          <a:custGeom>
-            <a:avLst/>
-            <a:gdLst/>
-            <a:ahLst/>
-            <a:cxnLst/>
-            <a:rect r="r" b="b" t="t" l="l"/>
-            <a:pathLst>
-              <a:path h="1002427" w="860834">
-                <a:moveTo>
-                  <a:pt x="0" y="0"/>
-                </a:moveTo>
-                <a:lnTo>
-                  <a:pt x="860835" y="0"/>
-                </a:lnTo>
-                <a:lnTo>
-                  <a:pt x="860835" y="1002427"/>
-                </a:lnTo>
-                <a:lnTo>
-                  <a:pt x="0" y="1002427"/>
-                </a:lnTo>
-                <a:lnTo>
-                  <a:pt x="0" y="0"/>
-                </a:lnTo>
-                <a:close/>
-              </a:path>
-            </a:pathLst>
-          </a:custGeom>
-          <a:blipFill>
-            <a:blip r:embed="rId3">
-              <a:extLst>
-                <a:ext uri="{96DAC541-7B7A-43D3-8B79-37D633B846F1}">
-                  <asvg:svgBlip xmlns:asvg="http://schemas.microsoft.com/office/drawing/2016/SVG/main" r:embed="rId4"/>
-                </a:ext>
-              </a:extLst>
-            </a:blip>
-            <a:stretch>
-              <a:fillRect l="0" t="0" r="0" b="0"/>
-            </a:stretch>
-          </a:blipFill>
-        </p:spPr>
-      </p:sp>
-      <p:sp>
-        <p:nvSpPr>
-          <p:cNvPr name="TextBox 10" id="10"/>
+          <p:cNvPr name="TextBox 6" id="6"/>
           <p:cNvSpPr txBox="true"/>
           <p:nvPr/>
         </p:nvSpPr>
         <p:spPr>
           <a:xfrm rot="0">
-            <a:off x="1168678" y="3725882"/>
-            <a:ext cx="5274557" cy="1095375"/>
+            <a:off x="5101341" y="715226"/>
+            <a:ext cx="8085318" cy="2153656"/>
           </a:xfrm>
           <a:prstGeom prst="rect">
             <a:avLst/>
@@ -10618,16 +11023,13 @@
           </a:bodyPr>
           <a:lstStyle/>
           <a:p>
-            <a:pPr algn="ctr" marL="0" indent="0" lvl="1">
+            <a:pPr algn="ctr" marL="0" indent="0" lvl="0">
               <a:lnSpc>
-                <a:spcPts val="8400"/>
+                <a:spcPts val="7988"/>
               </a:lnSpc>
-              <a:spcBef>
-                <a:spcPct val="0"/>
-              </a:spcBef>
             </a:pPr>
             <a:r>
-              <a:rPr lang="en-US" b="true" sz="6000">
+              <a:rPr lang="en-US" b="true" sz="8151">
                 <a:solidFill>
                   <a:srgbClr val="FFFFFF"/>
                 </a:solidFill>
@@ -10636,61 +11038,56 @@
                 <a:cs typeface="Poppins Bold"/>
                 <a:sym typeface="Poppins Bold"/>
               </a:rPr>
-              <a:t>Kesimpulan</a:t>
+              <a:t>Output Python Parsing</a:t>
             </a:r>
           </a:p>
         </p:txBody>
       </p:sp>
       <p:sp>
         <p:nvSpPr>
-          <p:cNvPr name="TextBox 11" id="11"/>
-          <p:cNvSpPr txBox="true"/>
+          <p:cNvPr name="Freeform 7" id="7"/>
+          <p:cNvSpPr/>
           <p:nvPr/>
         </p:nvSpPr>
         <p:spPr>
-          <a:xfrm rot="0">
-            <a:off x="1369309" y="4754582"/>
-            <a:ext cx="15889991" cy="3358514"/>
-          </a:xfrm>
-          <a:prstGeom prst="rect">
+          <a:xfrm flipH="false" flipV="false" rot="0">
+            <a:off x="2105651" y="4068114"/>
+            <a:ext cx="14076698" cy="3202449"/>
+          </a:xfrm>
+          <a:custGeom>
             <a:avLst/>
-          </a:prstGeom>
+            <a:gdLst/>
+            <a:ahLst/>
+            <a:cxnLst/>
+            <a:rect r="r" b="b" t="t" l="l"/>
+            <a:pathLst>
+              <a:path h="3202449" w="14076698">
+                <a:moveTo>
+                  <a:pt x="0" y="0"/>
+                </a:moveTo>
+                <a:lnTo>
+                  <a:pt x="14076698" y="0"/>
+                </a:lnTo>
+                <a:lnTo>
+                  <a:pt x="14076698" y="3202449"/>
+                </a:lnTo>
+                <a:lnTo>
+                  <a:pt x="0" y="3202449"/>
+                </a:lnTo>
+                <a:lnTo>
+                  <a:pt x="0" y="0"/>
+                </a:lnTo>
+                <a:close/>
+              </a:path>
+            </a:pathLst>
+          </a:custGeom>
+          <a:blipFill>
+            <a:blip r:embed="rId3"/>
+            <a:stretch>
+              <a:fillRect l="0" t="0" r="0" b="0"/>
+            </a:stretch>
+          </a:blipFill>
         </p:spPr>
-        <p:txBody>
-          <a:bodyPr anchor="t" rtlCol="false" tIns="0" lIns="0" bIns="0" rIns="0">
-            <a:spAutoFit/>
-          </a:bodyPr>
-          <a:lstStyle/>
-          <a:p>
-            <a:pPr algn="l">
-              <a:lnSpc>
-                <a:spcPts val="3360"/>
-              </a:lnSpc>
-            </a:pPr>
-          </a:p>
-          <a:p>
-            <a:pPr algn="l">
-              <a:lnSpc>
-                <a:spcPts val="3360"/>
-              </a:lnSpc>
-              <a:spcBef>
-                <a:spcPct val="0"/>
-              </a:spcBef>
-            </a:pPr>
-            <a:r>
-              <a:rPr lang="en-US" sz="2400">
-                <a:solidFill>
-                  <a:srgbClr val="FFFFFF"/>
-                </a:solidFill>
-                <a:latin typeface="Poppins"/>
-                <a:ea typeface="Poppins"/>
-                <a:cs typeface="Poppins"/>
-                <a:sym typeface="Poppins"/>
-              </a:rPr>
-              <a:t>Praktikum berhasil menunjukkan proses komunikasi data antara client dan server melalui HTTP. Pengujian API menggunakan Postman menghasilkan response sukses (200 OK dan 201 Created), sementara Wireshark menunjukkan tahapan komunikasi jaringan seperti TCP Handshake, HTTP Request/Response, dan TCP Retransmission. Data JSON yang diterima kemudian dianalisis dan diparsing menggunakan Python menjadi DataFrame atau CSV, sehingga lebih mudah dibaca dan diolah. Praktikum ini memberikan pemahaman mengenai hubungan antara TCP, HTTP, JSON, packet capture, dan parsing data dalam sistem komunikasi modern.</a:t>
-            </a:r>
-          </a:p>
-        </p:txBody>
       </p:sp>
     </p:spTree>
   </p:cSld>
